--- a/presentazione.pptx
+++ b/presentazione.pptx
@@ -346,7 +346,7 @@
             <a:fld id="{B61BEF0D-F0BB-DE4B-95CE-6DB70DBA9567}" type="datetimeFigureOut">
               <a:rPr lang="en-US" dirty="0"/>
               <a:pPr/>
-              <a:t>2/21/2026</a:t>
+              <a:t>2/25/2026</a:t>
             </a:fld>
             <a:endParaRPr lang="en-US" dirty="0"/>
           </a:p>
@@ -677,7 +677,7 @@
             <a:fld id="{B61BEF0D-F0BB-DE4B-95CE-6DB70DBA9567}" type="datetimeFigureOut">
               <a:rPr lang="en-US" dirty="0"/>
               <a:pPr/>
-              <a:t>2/21/2026</a:t>
+              <a:t>2/25/2026</a:t>
             </a:fld>
             <a:endParaRPr lang="en-US" dirty="0"/>
           </a:p>
@@ -952,7 +952,7 @@
             <a:fld id="{B61BEF0D-F0BB-DE4B-95CE-6DB70DBA9567}" type="datetimeFigureOut">
               <a:rPr lang="en-US" dirty="0"/>
               <a:pPr/>
-              <a:t>2/21/2026</a:t>
+              <a:t>2/25/2026</a:t>
             </a:fld>
             <a:endParaRPr lang="en-US" dirty="0"/>
           </a:p>
@@ -1517,7 +1517,7 @@
             <a:fld id="{B61BEF0D-F0BB-DE4B-95CE-6DB70DBA9567}" type="datetimeFigureOut">
               <a:rPr lang="en-US" dirty="0"/>
               <a:pPr/>
-              <a:t>2/21/2026</a:t>
+              <a:t>2/25/2026</a:t>
             </a:fld>
             <a:endParaRPr lang="en-US" dirty="0"/>
           </a:p>
@@ -1792,7 +1792,7 @@
             <a:fld id="{B61BEF0D-F0BB-DE4B-95CE-6DB70DBA9567}" type="datetimeFigureOut">
               <a:rPr lang="en-US" dirty="0"/>
               <a:pPr/>
-              <a:t>2/21/2026</a:t>
+              <a:t>2/25/2026</a:t>
             </a:fld>
             <a:endParaRPr lang="en-US" dirty="0"/>
           </a:p>
@@ -2351,7 +2351,7 @@
             <a:fld id="{B61BEF0D-F0BB-DE4B-95CE-6DB70DBA9567}" type="datetimeFigureOut">
               <a:rPr lang="en-US" dirty="0"/>
               <a:pPr/>
-              <a:t>2/21/2026</a:t>
+              <a:t>2/25/2026</a:t>
             </a:fld>
             <a:endParaRPr lang="en-US" dirty="0"/>
           </a:p>
@@ -2675,7 +2675,7 @@
             <a:fld id="{B61BEF0D-F0BB-DE4B-95CE-6DB70DBA9567}" type="datetimeFigureOut">
               <a:rPr lang="en-US" dirty="0"/>
               <a:pPr/>
-              <a:t>2/21/2026</a:t>
+              <a:t>2/25/2026</a:t>
             </a:fld>
             <a:endParaRPr lang="en-US" dirty="0"/>
           </a:p>
@@ -2849,7 +2849,7 @@
             <a:fld id="{B61BEF0D-F0BB-DE4B-95CE-6DB70DBA9567}" type="datetimeFigureOut">
               <a:rPr lang="en-US" dirty="0"/>
               <a:pPr/>
-              <a:t>2/21/2026</a:t>
+              <a:t>2/25/2026</a:t>
             </a:fld>
             <a:endParaRPr lang="en-US" dirty="0"/>
           </a:p>
@@ -3084,7 +3084,7 @@
             <a:fld id="{B61BEF0D-F0BB-DE4B-95CE-6DB70DBA9567}" type="datetimeFigureOut">
               <a:rPr lang="en-US" dirty="0"/>
               <a:pPr/>
-              <a:t>2/21/2026</a:t>
+              <a:t>2/25/2026</a:t>
             </a:fld>
             <a:endParaRPr lang="en-US" dirty="0"/>
           </a:p>
@@ -3281,7 +3281,7 @@
             <a:fld id="{B61BEF0D-F0BB-DE4B-95CE-6DB70DBA9567}" type="datetimeFigureOut">
               <a:rPr lang="en-US" dirty="0"/>
               <a:pPr/>
-              <a:t>2/21/2026</a:t>
+              <a:t>2/25/2026</a:t>
             </a:fld>
             <a:endParaRPr lang="en-US" dirty="0"/>
           </a:p>
@@ -3554,7 +3554,7 @@
             <a:fld id="{B61BEF0D-F0BB-DE4B-95CE-6DB70DBA9567}" type="datetimeFigureOut">
               <a:rPr lang="en-US" dirty="0"/>
               <a:pPr/>
-              <a:t>2/21/2026</a:t>
+              <a:t>2/25/2026</a:t>
             </a:fld>
             <a:endParaRPr lang="en-US" dirty="0"/>
           </a:p>
@@ -3817,7 +3817,7 @@
             <a:fld id="{B61BEF0D-F0BB-DE4B-95CE-6DB70DBA9567}" type="datetimeFigureOut">
               <a:rPr lang="en-US" dirty="0"/>
               <a:pPr/>
-              <a:t>2/21/2026</a:t>
+              <a:t>2/25/2026</a:t>
             </a:fld>
             <a:endParaRPr lang="en-US" dirty="0"/>
           </a:p>
@@ -4188,7 +4188,7 @@
             <a:fld id="{B61BEF0D-F0BB-DE4B-95CE-6DB70DBA9567}" type="datetimeFigureOut">
               <a:rPr lang="en-US" dirty="0"/>
               <a:pPr/>
-              <a:t>2/21/2026</a:t>
+              <a:t>2/25/2026</a:t>
             </a:fld>
             <a:endParaRPr lang="en-US" dirty="0"/>
           </a:p>
@@ -4333,7 +4333,7 @@
             <a:fld id="{B61BEF0D-F0BB-DE4B-95CE-6DB70DBA9567}" type="datetimeFigureOut">
               <a:rPr lang="en-US" dirty="0"/>
               <a:pPr/>
-              <a:t>2/21/2026</a:t>
+              <a:t>2/25/2026</a:t>
             </a:fld>
             <a:endParaRPr lang="en-US" dirty="0"/>
           </a:p>
@@ -4455,7 +4455,7 @@
             <a:fld id="{B61BEF0D-F0BB-DE4B-95CE-6DB70DBA9567}" type="datetimeFigureOut">
               <a:rPr lang="en-US" dirty="0"/>
               <a:pPr/>
-              <a:t>2/21/2026</a:t>
+              <a:t>2/25/2026</a:t>
             </a:fld>
             <a:endParaRPr lang="en-US" dirty="0"/>
           </a:p>
@@ -4737,7 +4737,7 @@
             <a:fld id="{B61BEF0D-F0BB-DE4B-95CE-6DB70DBA9567}" type="datetimeFigureOut">
               <a:rPr lang="en-US" dirty="0"/>
               <a:pPr/>
-              <a:t>2/21/2026</a:t>
+              <a:t>2/25/2026</a:t>
             </a:fld>
             <a:endParaRPr lang="en-US" dirty="0"/>
           </a:p>
@@ -5058,7 +5058,7 @@
             <a:fld id="{B61BEF0D-F0BB-DE4B-95CE-6DB70DBA9567}" type="datetimeFigureOut">
               <a:rPr lang="en-US" dirty="0"/>
               <a:pPr/>
-              <a:t>2/21/2026</a:t>
+              <a:t>2/25/2026</a:t>
             </a:fld>
             <a:endParaRPr lang="en-US" dirty="0"/>
           </a:p>
@@ -5269,7 +5269,7 @@
             <a:fld id="{B61BEF0D-F0BB-DE4B-95CE-6DB70DBA9567}" type="datetimeFigureOut">
               <a:rPr lang="en-US" dirty="0"/>
               <a:pPr/>
-              <a:t>2/21/2026</a:t>
+              <a:t>2/25/2026</a:t>
             </a:fld>
             <a:endParaRPr lang="en-US" dirty="0"/>
           </a:p>
@@ -7268,8 +7268,8 @@
         </p:nvSpPr>
         <p:spPr>
           <a:xfrm>
-            <a:off x="502920" y="1582340"/>
-            <a:ext cx="11338560" cy="3139321"/>
+            <a:off x="537755" y="1695552"/>
+            <a:ext cx="11338560" cy="2031325"/>
           </a:xfrm>
           <a:prstGeom prst="rect">
             <a:avLst/>
@@ -7300,15 +7300,7 @@
             </a:r>
             <a:r>
               <a:rPr lang="it-IT" sz="3600" dirty="0"/>
-              <a:t> e-mail </a:t>
-            </a:r>
-            <a:r>
-              <a:rPr lang="it-IT" sz="3600" dirty="0" err="1"/>
-              <a:t>traffic</a:t>
-            </a:r>
-            <a:r>
-              <a:rPr lang="it-IT" sz="3600" dirty="0"/>
-              <a:t> source more </a:t>
+              <a:t> e-mail more </a:t>
             </a:r>
             <a:r>
               <a:rPr lang="it-IT" sz="3600" dirty="0" err="1"/>
@@ -7368,13 +7360,6 @@
               <a:rPr lang="it-IT" sz="3600" dirty="0"/>
               <a:t> centers?</a:t>
             </a:r>
-          </a:p>
-          <a:p>
-            <a:pPr marL="285750" indent="-285750">
-              <a:buFont typeface="Arial" panose="020B0604020202020204" pitchFamily="34" charset="0"/>
-              <a:buChar char="•"/>
-            </a:pPr>
-            <a:endParaRPr lang="it-IT" sz="3600" dirty="0"/>
           </a:p>
           <a:p>
             <a:endParaRPr lang="it-IT" dirty="0"/>
@@ -7410,7 +7395,7 @@
         </p:blipFill>
         <p:spPr bwMode="auto">
           <a:xfrm>
-            <a:off x="5491298" y="3429000"/>
+            <a:off x="5317126" y="3089365"/>
             <a:ext cx="4762500" cy="2981325"/>
           </a:xfrm>
           <a:prstGeom prst="rect">

--- a/presentazione.pptx
+++ b/presentazione.pptx
@@ -346,7 +346,7 @@
             <a:fld id="{B61BEF0D-F0BB-DE4B-95CE-6DB70DBA9567}" type="datetimeFigureOut">
               <a:rPr lang="en-US" dirty="0"/>
               <a:pPr/>
-              <a:t>2/25/2026</a:t>
+              <a:t>2/27/2026</a:t>
             </a:fld>
             <a:endParaRPr lang="en-US" dirty="0"/>
           </a:p>
@@ -677,7 +677,7 @@
             <a:fld id="{B61BEF0D-F0BB-DE4B-95CE-6DB70DBA9567}" type="datetimeFigureOut">
               <a:rPr lang="en-US" dirty="0"/>
               <a:pPr/>
-              <a:t>2/25/2026</a:t>
+              <a:t>2/27/2026</a:t>
             </a:fld>
             <a:endParaRPr lang="en-US" dirty="0"/>
           </a:p>
@@ -952,7 +952,7 @@
             <a:fld id="{B61BEF0D-F0BB-DE4B-95CE-6DB70DBA9567}" type="datetimeFigureOut">
               <a:rPr lang="en-US" dirty="0"/>
               <a:pPr/>
-              <a:t>2/25/2026</a:t>
+              <a:t>2/27/2026</a:t>
             </a:fld>
             <a:endParaRPr lang="en-US" dirty="0"/>
           </a:p>
@@ -1517,7 +1517,7 @@
             <a:fld id="{B61BEF0D-F0BB-DE4B-95CE-6DB70DBA9567}" type="datetimeFigureOut">
               <a:rPr lang="en-US" dirty="0"/>
               <a:pPr/>
-              <a:t>2/25/2026</a:t>
+              <a:t>2/27/2026</a:t>
             </a:fld>
             <a:endParaRPr lang="en-US" dirty="0"/>
           </a:p>
@@ -1792,7 +1792,7 @@
             <a:fld id="{B61BEF0D-F0BB-DE4B-95CE-6DB70DBA9567}" type="datetimeFigureOut">
               <a:rPr lang="en-US" dirty="0"/>
               <a:pPr/>
-              <a:t>2/25/2026</a:t>
+              <a:t>2/27/2026</a:t>
             </a:fld>
             <a:endParaRPr lang="en-US" dirty="0"/>
           </a:p>
@@ -2351,7 +2351,7 @@
             <a:fld id="{B61BEF0D-F0BB-DE4B-95CE-6DB70DBA9567}" type="datetimeFigureOut">
               <a:rPr lang="en-US" dirty="0"/>
               <a:pPr/>
-              <a:t>2/25/2026</a:t>
+              <a:t>2/27/2026</a:t>
             </a:fld>
             <a:endParaRPr lang="en-US" dirty="0"/>
           </a:p>
@@ -2675,7 +2675,7 @@
             <a:fld id="{B61BEF0D-F0BB-DE4B-95CE-6DB70DBA9567}" type="datetimeFigureOut">
               <a:rPr lang="en-US" dirty="0"/>
               <a:pPr/>
-              <a:t>2/25/2026</a:t>
+              <a:t>2/27/2026</a:t>
             </a:fld>
             <a:endParaRPr lang="en-US" dirty="0"/>
           </a:p>
@@ -2849,7 +2849,7 @@
             <a:fld id="{B61BEF0D-F0BB-DE4B-95CE-6DB70DBA9567}" type="datetimeFigureOut">
               <a:rPr lang="en-US" dirty="0"/>
               <a:pPr/>
-              <a:t>2/25/2026</a:t>
+              <a:t>2/27/2026</a:t>
             </a:fld>
             <a:endParaRPr lang="en-US" dirty="0"/>
           </a:p>
@@ -3084,7 +3084,7 @@
             <a:fld id="{B61BEF0D-F0BB-DE4B-95CE-6DB70DBA9567}" type="datetimeFigureOut">
               <a:rPr lang="en-US" dirty="0"/>
               <a:pPr/>
-              <a:t>2/25/2026</a:t>
+              <a:t>2/27/2026</a:t>
             </a:fld>
             <a:endParaRPr lang="en-US" dirty="0"/>
           </a:p>
@@ -3281,7 +3281,7 @@
             <a:fld id="{B61BEF0D-F0BB-DE4B-95CE-6DB70DBA9567}" type="datetimeFigureOut">
               <a:rPr lang="en-US" dirty="0"/>
               <a:pPr/>
-              <a:t>2/25/2026</a:t>
+              <a:t>2/27/2026</a:t>
             </a:fld>
             <a:endParaRPr lang="en-US" dirty="0"/>
           </a:p>
@@ -3554,7 +3554,7 @@
             <a:fld id="{B61BEF0D-F0BB-DE4B-95CE-6DB70DBA9567}" type="datetimeFigureOut">
               <a:rPr lang="en-US" dirty="0"/>
               <a:pPr/>
-              <a:t>2/25/2026</a:t>
+              <a:t>2/27/2026</a:t>
             </a:fld>
             <a:endParaRPr lang="en-US" dirty="0"/>
           </a:p>
@@ -3817,7 +3817,7 @@
             <a:fld id="{B61BEF0D-F0BB-DE4B-95CE-6DB70DBA9567}" type="datetimeFigureOut">
               <a:rPr lang="en-US" dirty="0"/>
               <a:pPr/>
-              <a:t>2/25/2026</a:t>
+              <a:t>2/27/2026</a:t>
             </a:fld>
             <a:endParaRPr lang="en-US" dirty="0"/>
           </a:p>
@@ -4188,7 +4188,7 @@
             <a:fld id="{B61BEF0D-F0BB-DE4B-95CE-6DB70DBA9567}" type="datetimeFigureOut">
               <a:rPr lang="en-US" dirty="0"/>
               <a:pPr/>
-              <a:t>2/25/2026</a:t>
+              <a:t>2/27/2026</a:t>
             </a:fld>
             <a:endParaRPr lang="en-US" dirty="0"/>
           </a:p>
@@ -4333,7 +4333,7 @@
             <a:fld id="{B61BEF0D-F0BB-DE4B-95CE-6DB70DBA9567}" type="datetimeFigureOut">
               <a:rPr lang="en-US" dirty="0"/>
               <a:pPr/>
-              <a:t>2/25/2026</a:t>
+              <a:t>2/27/2026</a:t>
             </a:fld>
             <a:endParaRPr lang="en-US" dirty="0"/>
           </a:p>
@@ -4455,7 +4455,7 @@
             <a:fld id="{B61BEF0D-F0BB-DE4B-95CE-6DB70DBA9567}" type="datetimeFigureOut">
               <a:rPr lang="en-US" dirty="0"/>
               <a:pPr/>
-              <a:t>2/25/2026</a:t>
+              <a:t>2/27/2026</a:t>
             </a:fld>
             <a:endParaRPr lang="en-US" dirty="0"/>
           </a:p>
@@ -4737,7 +4737,7 @@
             <a:fld id="{B61BEF0D-F0BB-DE4B-95CE-6DB70DBA9567}" type="datetimeFigureOut">
               <a:rPr lang="en-US" dirty="0"/>
               <a:pPr/>
-              <a:t>2/25/2026</a:t>
+              <a:t>2/27/2026</a:t>
             </a:fld>
             <a:endParaRPr lang="en-US" dirty="0"/>
           </a:p>
@@ -5058,7 +5058,7 @@
             <a:fld id="{B61BEF0D-F0BB-DE4B-95CE-6DB70DBA9567}" type="datetimeFigureOut">
               <a:rPr lang="en-US" dirty="0"/>
               <a:pPr/>
-              <a:t>2/25/2026</a:t>
+              <a:t>2/27/2026</a:t>
             </a:fld>
             <a:endParaRPr lang="en-US" dirty="0"/>
           </a:p>
@@ -5269,7 +5269,7 @@
             <a:fld id="{B61BEF0D-F0BB-DE4B-95CE-6DB70DBA9567}" type="datetimeFigureOut">
               <a:rPr lang="en-US" dirty="0"/>
               <a:pPr/>
-              <a:t>2/25/2026</a:t>
+              <a:t>2/27/2026</a:t>
             </a:fld>
             <a:endParaRPr lang="en-US" dirty="0"/>
           </a:p>
